--- a/data/outputs/v2/Grade11/Biology/Quizzes/SS2.2_Growth_and_Development_in_Plants/Biology_G11_SS2.2_Growth_and_Development_in_Plants_L7_QuickCheck.pptx
+++ b/data/outputs/v2/Grade11/Biology/Quizzes/SS2.2_Growth_and_Development_in_Plants/Biology_G11_SS2.2_Growth_and_Development_in_Plants_L7_QuickCheck.pptx
@@ -14,9 +14,10 @@
     <p:sldId id="262" r:id="rId8"/>
     <p:sldId id="263" r:id="rId9"/>
     <p:sldId id="264" r:id="rId10"/>
+    <p:sldId id="265" r:id="rId11"/>
   </p:sldIdLst>
   <p:notesMasterIdLst>
-    <p:notesMasterId r:id="rId11"/>
+    <p:notesMasterId r:id="rId12"/>
   </p:notesMasterIdLst>
   <p:sldSz cx="12192000" cy="6858000"/>
   <p:notesSz cx="6858000" cy="12192000"/>
@@ -534,6 +535,94 @@
             <a:fld id="{F7021451-1387-4CA6-816F-3879F97B5CBC}" type="slidenum">
               <a:rPr lang="en-US"/>
               <a:t>1</a:t>
+            </a:fld>
+            <a:endParaRPr lang="en-US"/>
+          </a:p>
+        </p:txBody>
+      </p:sp>
+    </p:spTree>
+    <p:extLst>
+      <p:ext uri="{BB962C8B-B14F-4D97-AF65-F5344CB8AC3E}">
+        <p14:creationId xmlns:p14="http://schemas.microsoft.com/office/powerpoint/2010/main" val="1024086991"/>
+      </p:ext>
+    </p:extLst>
+  </p:cSld>
+  <p:clrMapOvr>
+    <a:masterClrMapping/>
+  </p:clrMapOvr>
+</p:notes>
+</file>
+
+<file path=ppt/notesSlides/notesSlide10.xml><?xml version="1.0" encoding="utf-8"?>
+<p:notes xmlns:a="http://schemas.openxmlformats.org/drawingml/2006/main" xmlns:r="http://schemas.openxmlformats.org/officeDocument/2006/relationships" xmlns:p="http://schemas.openxmlformats.org/presentationml/2006/main">
+  <p:cSld>
+    <p:spTree>
+      <p:nvGrpSpPr>
+        <p:cNvPr id="1" name=""/>
+        <p:cNvGrpSpPr/>
+        <p:nvPr/>
+      </p:nvGrpSpPr>
+      <p:grpSpPr>
+        <a:xfrm>
+          <a:off x="0" y="0"/>
+          <a:ext cx="0" cy="0"/>
+          <a:chOff x="0" y="0"/>
+          <a:chExt cx="0" cy="0"/>
+        </a:xfrm>
+      </p:grpSpPr>
+      <p:sp>
+        <p:nvSpPr>
+          <p:cNvPr id="2" name="Slide Image Placeholder 1"/>
+          <p:cNvSpPr>
+            <a:spLocks noGrp="1" noRot="1" noChangeAspect="1"/>
+          </p:cNvSpPr>
+          <p:nvPr>
+            <p:ph type="sldImg"/>
+          </p:nvPr>
+        </p:nvSpPr>
+        <p:spPr/>
+      </p:sp>
+      <p:sp>
+        <p:nvSpPr>
+          <p:cNvPr id="3" name="Notes Placeholder 2"/>
+          <p:cNvSpPr>
+            <a:spLocks noGrp="1"/>
+          </p:cNvSpPr>
+          <p:nvPr>
+            <p:ph type="body" idx="1"/>
+          </p:nvPr>
+        </p:nvSpPr>
+        <p:spPr/>
+        <p:txBody>
+          <a:bodyPr/>
+          <a:lstStyle/>
+          <a:p>
+            <a:r>
+              <a:rPr lang="en-US" dirty="0"/>
+              <a:t/>
+            </a:r>
+            <a:endParaRPr lang="en-US" dirty="0"/>
+          </a:p>
+        </p:txBody>
+      </p:sp>
+      <p:sp>
+        <p:nvSpPr>
+          <p:cNvPr id="4" name="Slide Number Placeholder 3"/>
+          <p:cNvSpPr>
+            <a:spLocks noGrp="1"/>
+          </p:cNvSpPr>
+          <p:nvPr>
+            <p:ph type="sldNum" sz="quarter" idx="10"/>
+          </p:nvPr>
+        </p:nvSpPr>
+        <p:spPr/>
+        <p:txBody>
+          <a:bodyPr/>
+          <a:lstStyle/>
+          <a:p>
+            <a:fld id="{F7021451-1387-4CA6-816F-3879F97B5CBC}" type="slidenum">
+              <a:rPr lang="en-US"/>
+              <a:t>10</a:t>
             </a:fld>
             <a:endParaRPr lang="en-US"/>
           </a:p>
@@ -1698,7 +1787,7 @@
                 <a:ea typeface="Arial" pitchFamily="34" charset="-122"/>
                 <a:cs typeface="Arial" pitchFamily="34" charset="-120"/>
               </a:rPr>
-              <a:t>Lesson 7: Plant Hormones: What Controls Growth in Maize and Bean Seedlings?</a:t>
+              <a:t>Lesson 7: Plant Hormones and Apical Dominance: What Coordinates Growth in Maize and Beans?</a:t>
             </a:r>
             <a:endParaRPr lang="en-US" sz="2000" dirty="0"/>
           </a:p>
@@ -1737,7 +1826,7 @@
                 <a:ea typeface="Arial" pitchFamily="34" charset="-122"/>
                 <a:cs typeface="Arial" pitchFamily="34" charset="-120"/>
               </a:rPr>
-              <a:t>7 multiple-choice questions  •  choose A, B, C or D</a:t>
+              <a:t>8 multiple-choice questions  •  choose A, B, C or D</a:t>
             </a:r>
             <a:endParaRPr lang="en-US" sz="1600" dirty="0"/>
           </a:p>
@@ -1853,6 +1942,116 @@
               <a:t> (https://creativecommons.org/licenses/by-nc/4.0/).</a:t>
             </a:r>
             <a:endParaRPr lang="en-US" sz="900" dirty="0"/>
+          </a:p>
+        </p:txBody>
+      </p:sp>
+    </p:spTree>
+  </p:cSld>
+  <p:clrMapOvr>
+    <a:masterClrMapping/>
+  </p:clrMapOvr>
+</p:sld>
+</file>
+
+<file path=ppt/slides/slide10.xml><?xml version="1.0" encoding="utf-8"?>
+<p:sld xmlns:a="http://schemas.openxmlformats.org/drawingml/2006/main" xmlns:r="http://schemas.openxmlformats.org/officeDocument/2006/relationships" xmlns:p="http://schemas.openxmlformats.org/presentationml/2006/main">
+  <p:cSld name="Slide 10">
+    <p:bg>
+      <p:bgPr>
+        <a:solidFill>
+          <a:srgbClr val="1F3864"/>
+        </a:solidFill>
+      </p:bgPr>
+    </p:bg>
+    <p:spTree>
+      <p:nvGrpSpPr>
+        <p:cNvPr id="1" name=""/>
+        <p:cNvGrpSpPr/>
+        <p:nvPr/>
+      </p:nvGrpSpPr>
+      <p:grpSpPr>
+        <a:xfrm>
+          <a:off x="0" y="0"/>
+          <a:ext cx="0" cy="0"/>
+          <a:chOff x="0" y="0"/>
+          <a:chExt cx="0" cy="0"/>
+        </a:xfrm>
+      </p:grpSpPr>
+      <p:sp>
+        <p:nvSpPr>
+          <p:cNvPr id="2" name="Text 0"/>
+          <p:cNvSpPr/>
+          <p:nvPr/>
+        </p:nvSpPr>
+        <p:spPr>
+          <a:xfrm>
+            <a:off x="731520" y="2194560"/>
+            <a:ext cx="10698480" cy="822960"/>
+          </a:xfrm>
+          <a:prstGeom prst="rect">
+            <a:avLst/>
+          </a:prstGeom>
+          <a:noFill/>
+          <a:ln/>
+        </p:spPr>
+        <p:txBody>
+          <a:bodyPr wrap="square" lIns="0" tIns="0" rIns="0" bIns="0" rtlCol="0" anchor="ctr"/>
+          <a:lstStyle/>
+          <a:p>
+            <a:pPr indent="0" marL="0">
+              <a:buNone/>
+            </a:pPr>
+            <a:r>
+              <a:rPr lang="en-US" sz="3400" b="1" dirty="0">
+                <a:solidFill>
+                  <a:srgbClr val="FFFFFF"/>
+                </a:solidFill>
+                <a:latin typeface="Arial" pitchFamily="34" charset="0"/>
+                <a:ea typeface="Arial" pitchFamily="34" charset="-122"/>
+                <a:cs typeface="Arial" pitchFamily="34" charset="-120"/>
+              </a:rPr>
+              <a:t>All done</a:t>
+            </a:r>
+            <a:endParaRPr lang="en-US" sz="3400" dirty="0"/>
+          </a:p>
+        </p:txBody>
+      </p:sp>
+      <p:sp>
+        <p:nvSpPr>
+          <p:cNvPr id="3" name="Text 1"/>
+          <p:cNvSpPr/>
+          <p:nvPr/>
+        </p:nvSpPr>
+        <p:spPr>
+          <a:xfrm>
+            <a:off x="731520" y="3108960"/>
+            <a:ext cx="10698480" cy="731520"/>
+          </a:xfrm>
+          <a:prstGeom prst="rect">
+            <a:avLst/>
+          </a:prstGeom>
+          <a:noFill/>
+          <a:ln/>
+        </p:spPr>
+        <p:txBody>
+          <a:bodyPr wrap="square" lIns="0" tIns="0" rIns="0" bIns="0" rtlCol="0" anchor="ctr"/>
+          <a:lstStyle/>
+          <a:p>
+            <a:pPr indent="0" marL="0">
+              <a:buNone/>
+            </a:pPr>
+            <a:r>
+              <a:rPr lang="en-US" sz="1800" dirty="0">
+                <a:solidFill>
+                  <a:srgbClr val="D9EEF1"/>
+                </a:solidFill>
+                <a:latin typeface="Arial" pitchFamily="34" charset="0"/>
+                <a:ea typeface="Arial" pitchFamily="34" charset="-122"/>
+                <a:cs typeface="Arial" pitchFamily="34" charset="-120"/>
+              </a:rPr>
+              <a:t>Ask your teacher how to submit your answers today (for example, on a paper answer slip).</a:t>
+            </a:r>
+            <a:endParaRPr lang="en-US" sz="1800" dirty="0"/>
           </a:p>
         </p:txBody>
       </p:sp>
@@ -1921,7 +2120,7 @@
                 <a:ea typeface="Arial" pitchFamily="34" charset="-122"/>
                 <a:cs typeface="Arial" pitchFamily="34" charset="-120"/>
               </a:rPr>
-              <a:t>QUESTION 1 OF 7</a:t>
+              <a:t>QUESTION 1 OF 8</a:t>
             </a:r>
             <a:endParaRPr lang="en-US" sz="1300" dirty="0"/>
           </a:p>
@@ -1982,7 +2181,7 @@
                 <a:ea typeface="Arial" pitchFamily="34" charset="-122"/>
                 <a:cs typeface="Arial" pitchFamily="34" charset="-120"/>
               </a:rPr>
-              <a:t>Use after: Observe phase</a:t>
+              <a:t>Use after: Predict phase</a:t>
             </a:r>
             <a:endParaRPr lang="en-US" sz="1100" dirty="0"/>
           </a:p>
@@ -2021,7 +2220,7 @@
                 <a:ea typeface="Arial" pitchFamily="34" charset="-122"/>
                 <a:cs typeface="Arial" pitchFamily="34" charset="-120"/>
               </a:rPr>
-              <a:t>A farmer in Kakamega plants bean seeds on the same day after rain. One healthy-looking seed has not germinated because it is still dormant. Which hormone could help break its dormancy and start germination?</a:t>
+              <a:t>Mr. Wafula's Rosecoco beans with the shoot tip intact had 0 branches at Day 25. Beans with the tip removed at Day 20 had 3 lateral branches by Day 32. What is the best prediction for why removing the tip made the beans branch?</a:t>
             </a:r>
             <a:endParaRPr lang="en-US" sz="1800" dirty="0"/>
           </a:p>
@@ -2121,7 +2320,7 @@
                 <a:ea typeface="Arial" pitchFamily="34" charset="-122"/>
                 <a:cs typeface="Arial" pitchFamily="34" charset="-120"/>
               </a:rPr>
-              <a:t>Abscisic acid</a:t>
+              <a:t>The plant got more sunlight on the side buds after the tip was cut</a:t>
             </a:r>
             <a:endParaRPr lang="en-US" sz="1700" dirty="0"/>
           </a:p>
@@ -2221,7 +2420,7 @@
                 <a:ea typeface="Arial" pitchFamily="34" charset="-122"/>
                 <a:cs typeface="Arial" pitchFamily="34" charset="-120"/>
               </a:rPr>
-              <a:t>Ethylene</a:t>
+              <a:t>Cutting the tip made the plant absorb more water from the soil</a:t>
             </a:r>
             <a:endParaRPr lang="en-US" sz="1700" dirty="0"/>
           </a:p>
@@ -2321,7 +2520,7 @@
                 <a:ea typeface="Arial" pitchFamily="34" charset="-122"/>
                 <a:cs typeface="Arial" pitchFamily="34" charset="-120"/>
               </a:rPr>
-              <a:t>Gibberellins</a:t>
+              <a:t>Something made in the shoot tip was stopping the side buds from growing</a:t>
             </a:r>
             <a:endParaRPr lang="en-US" sz="1700" dirty="0"/>
           </a:p>
@@ -2421,7 +2620,7 @@
                 <a:ea typeface="Arial" pitchFamily="34" charset="-122"/>
                 <a:cs typeface="Arial" pitchFamily="34" charset="-120"/>
               </a:rPr>
-              <a:t>Auxin from the stem tip only</a:t>
+              <a:t>Side buds only grow when the plant is damaged and needs to heal</a:t>
             </a:r>
             <a:endParaRPr lang="en-US" sz="1700" dirty="0"/>
           </a:p>
@@ -2531,7 +2730,7 @@
                 <a:ea typeface="Arial" pitchFamily="34" charset="-122"/>
                 <a:cs typeface="Arial" pitchFamily="34" charset="-120"/>
               </a:rPr>
-              <a:t>QUESTION 2 OF 7</a:t>
+              <a:t>QUESTION 2 OF 8</a:t>
             </a:r>
             <a:endParaRPr lang="en-US" sz="1300" dirty="0"/>
           </a:p>
@@ -2631,7 +2830,7 @@
                 <a:ea typeface="Arial" pitchFamily="34" charset="-122"/>
                 <a:cs typeface="Arial" pitchFamily="34" charset="-120"/>
               </a:rPr>
-              <a:t>Which hormone keeps a seed dormant and also causes the stomata of a leaf to close?</a:t>
+              <a:t>Which plant hormone is made in the shoot tip, promotes stem elongation and inhibits the growth of lateral buds?</a:t>
             </a:r>
             <a:endParaRPr lang="en-US" sz="2300" dirty="0"/>
           </a:p>
@@ -2831,7 +3030,7 @@
                 <a:ea typeface="Arial" pitchFamily="34" charset="-122"/>
                 <a:cs typeface="Arial" pitchFamily="34" charset="-120"/>
               </a:rPr>
-              <a:t>Cytokinin</a:t>
+              <a:t>Auxin (IAA)</a:t>
             </a:r>
             <a:endParaRPr lang="en-US" sz="1700" dirty="0"/>
           </a:p>
@@ -3031,7 +3230,7 @@
                 <a:ea typeface="Arial" pitchFamily="34" charset="-122"/>
                 <a:cs typeface="Arial" pitchFamily="34" charset="-120"/>
               </a:rPr>
-              <a:t>Gibberellin</a:t>
+              <a:t>Cytokinin</a:t>
             </a:r>
             <a:endParaRPr lang="en-US" sz="1700" dirty="0"/>
           </a:p>
@@ -3141,7 +3340,7 @@
                 <a:ea typeface="Arial" pitchFamily="34" charset="-122"/>
                 <a:cs typeface="Arial" pitchFamily="34" charset="-120"/>
               </a:rPr>
-              <a:t>QUESTION 3 OF 7</a:t>
+              <a:t>QUESTION 3 OF 8</a:t>
             </a:r>
             <a:endParaRPr lang="en-US" sz="1300" dirty="0"/>
           </a:p>
@@ -3241,7 +3440,7 @@
                 <a:ea typeface="Arial" pitchFamily="34" charset="-122"/>
                 <a:cs typeface="Arial" pitchFamily="34" charset="-120"/>
               </a:rPr>
-              <a:t>Green bananas bought by a trader in Mombasa turn yellow and soft as they ripen. Which plant hormone controls this ripening?</a:t>
+              <a:t>A learner is completing a hormone table. Which hormone is the odd one out because it works as a gas and promotes fruit ripening?</a:t>
             </a:r>
             <a:endParaRPr lang="en-US" sz="2000" dirty="0"/>
           </a:p>
@@ -3341,7 +3540,7 @@
                 <a:ea typeface="Arial" pitchFamily="34" charset="-122"/>
                 <a:cs typeface="Arial" pitchFamily="34" charset="-120"/>
               </a:rPr>
-              <a:t>Cytokinin</a:t>
+              <a:t>Gibberellins</a:t>
             </a:r>
             <a:endParaRPr lang="en-US" sz="1700" dirty="0"/>
           </a:p>
@@ -3441,7 +3640,7 @@
                 <a:ea typeface="Arial" pitchFamily="34" charset="-122"/>
                 <a:cs typeface="Arial" pitchFamily="34" charset="-120"/>
               </a:rPr>
-              <a:t>Gibberellin</a:t>
+              <a:t>Cytokinin</a:t>
             </a:r>
             <a:endParaRPr lang="en-US" sz="1700" dirty="0"/>
           </a:p>
@@ -3541,7 +3740,7 @@
                 <a:ea typeface="Arial" pitchFamily="34" charset="-122"/>
                 <a:cs typeface="Arial" pitchFamily="34" charset="-120"/>
               </a:rPr>
-              <a:t>Auxin</a:t>
+              <a:t>Ethylene</a:t>
             </a:r>
             <a:endParaRPr lang="en-US" sz="1700" dirty="0"/>
           </a:p>
@@ -3641,7 +3840,7 @@
                 <a:ea typeface="Arial" pitchFamily="34" charset="-122"/>
                 <a:cs typeface="Arial" pitchFamily="34" charset="-120"/>
               </a:rPr>
-              <a:t>Ethylene</a:t>
+              <a:t>Auxin (IAA)</a:t>
             </a:r>
             <a:endParaRPr lang="en-US" sz="1700" dirty="0"/>
           </a:p>
@@ -3751,7 +3950,7 @@
                 <a:ea typeface="Arial" pitchFamily="34" charset="-122"/>
                 <a:cs typeface="Arial" pitchFamily="34" charset="-120"/>
               </a:rPr>
-              <a:t>QUESTION 4 OF 7</a:t>
+              <a:t>QUESTION 4 OF 8</a:t>
             </a:r>
             <a:endParaRPr lang="en-US" sz="1300" dirty="0"/>
           </a:p>
@@ -3843,17 +4042,17 @@
               <a:buNone/>
             </a:pPr>
             <a:r>
-              <a:rPr lang="en-US" sz="2000" b="1" dirty="0">
-                <a:solidFill>
-                  <a:srgbClr val="FFFFFF"/>
-                </a:solidFill>
-                <a:latin typeface="Arial" pitchFamily="34" charset="0"/>
-                <a:ea typeface="Arial" pitchFamily="34" charset="-122"/>
-                <a:cs typeface="Arial" pitchFamily="34" charset="-120"/>
-              </a:rPr>
-              <a:t>A farmer cuts off the tip of a bean stem and soon side shoots start to grow from the lateral buds. What best explains this?</a:t>
-            </a:r>
-            <a:endParaRPr lang="en-US" sz="2000" dirty="0"/>
+              <a:rPr lang="en-US" sz="1800" b="1" dirty="0">
+                <a:solidFill>
+                  <a:srgbClr val="FFFFFF"/>
+                </a:solidFill>
+                <a:latin typeface="Arial" pitchFamily="34" charset="0"/>
+                <a:ea typeface="Arial" pitchFamily="34" charset="-122"/>
+                <a:cs typeface="Arial" pitchFamily="34" charset="-120"/>
+              </a:rPr>
+              <a:t>In Mr. Wafula's experiment, a bean plant with its shoot tip intact had 1 main stem and 0 branches at Day 25. A bean plant with the tip removed at Day 20 had 3 lateral branches by Day 32. Which Claim-Evidence-Reasoning statement is the strongest explanation?</a:t>
+            </a:r>
+            <a:endParaRPr lang="en-US" sz="1800" dirty="0"/>
           </a:p>
         </p:txBody>
       </p:sp>
@@ -3943,17 +4142,17 @@
               <a:buNone/>
             </a:pPr>
             <a:r>
-              <a:rPr lang="en-US" sz="1500" dirty="0">
-                <a:solidFill>
-                  <a:srgbClr val="FFFFFF"/>
-                </a:solidFill>
-                <a:latin typeface="Arial" pitchFamily="34" charset="0"/>
-                <a:ea typeface="Arial" pitchFamily="34" charset="-122"/>
-                <a:cs typeface="Arial" pitchFamily="34" charset="-120"/>
-              </a:rPr>
-              <a:t>The tip makes abscisic acid that feeds the side buds, so removing it stops branching</a:t>
-            </a:r>
-            <a:endParaRPr lang="en-US" sz="1500" dirty="0"/>
+              <a:rPr lang="en-US" sz="1300" dirty="0">
+                <a:solidFill>
+                  <a:srgbClr val="FFFFFF"/>
+                </a:solidFill>
+                <a:latin typeface="Arial" pitchFamily="34" charset="0"/>
+                <a:ea typeface="Arial" pitchFamily="34" charset="-122"/>
+                <a:cs typeface="Arial" pitchFamily="34" charset="-120"/>
+              </a:rPr>
+              <a:t>The plant with the tip removed was taller, so it grew more branches</a:t>
+            </a:r>
+            <a:endParaRPr lang="en-US" sz="1300" dirty="0"/>
           </a:p>
         </p:txBody>
       </p:sp>
@@ -4043,17 +4242,17 @@
               <a:buNone/>
             </a:pPr>
             <a:r>
-              <a:rPr lang="en-US" sz="1500" dirty="0">
-                <a:solidFill>
-                  <a:srgbClr val="FFFFFF"/>
-                </a:solidFill>
-                <a:latin typeface="Arial" pitchFamily="34" charset="0"/>
-                <a:ea typeface="Arial" pitchFamily="34" charset="-122"/>
-                <a:cs typeface="Arial" pitchFamily="34" charset="-120"/>
-              </a:rPr>
-              <a:t>The tip absorbs the rainwater, so removing it leaves more water for the side buds</a:t>
-            </a:r>
-            <a:endParaRPr lang="en-US" sz="1500" dirty="0"/>
+              <a:rPr lang="en-US" sz="1300" dirty="0">
+                <a:solidFill>
+                  <a:srgbClr val="FFFFFF"/>
+                </a:solidFill>
+                <a:latin typeface="Arial" pitchFamily="34" charset="0"/>
+                <a:ea typeface="Arial" pitchFamily="34" charset="-122"/>
+                <a:cs typeface="Arial" pitchFamily="34" charset="-120"/>
+              </a:rPr>
+              <a:t>Branches grow after Day 30 in all beans, so the tip made no difference</a:t>
+            </a:r>
+            <a:endParaRPr lang="en-US" sz="1300" dirty="0"/>
           </a:p>
         </p:txBody>
       </p:sp>
@@ -4143,17 +4342,17 @@
               <a:buNone/>
             </a:pPr>
             <a:r>
-              <a:rPr lang="en-US" sz="1500" dirty="0">
-                <a:solidFill>
-                  <a:srgbClr val="FFFFFF"/>
-                </a:solidFill>
-                <a:latin typeface="Arial" pitchFamily="34" charset="0"/>
-                <a:ea typeface="Arial" pitchFamily="34" charset="-122"/>
-                <a:cs typeface="Arial" pitchFamily="34" charset="-120"/>
-              </a:rPr>
-              <a:t>Cutting the tip makes the plant stop making any hormones</a:t>
-            </a:r>
-            <a:endParaRPr lang="en-US" sz="1500" dirty="0"/>
+              <a:rPr lang="en-US" sz="1300" dirty="0">
+                <a:solidFill>
+                  <a:srgbClr val="FFFFFF"/>
+                </a:solidFill>
+                <a:latin typeface="Arial" pitchFamily="34" charset="0"/>
+                <a:ea typeface="Arial" pitchFamily="34" charset="-122"/>
+                <a:cs typeface="Arial" pitchFamily="34" charset="-120"/>
+              </a:rPr>
+              <a:t>Cytokinin is made in the shoot tip and stops branching, so there were 0 branches</a:t>
+            </a:r>
+            <a:endParaRPr lang="en-US" sz="1300" dirty="0"/>
           </a:p>
         </p:txBody>
       </p:sp>
@@ -4243,17 +4442,17 @@
               <a:buNone/>
             </a:pPr>
             <a:r>
-              <a:rPr lang="en-US" sz="1500" dirty="0">
-                <a:solidFill>
-                  <a:srgbClr val="FFFFFF"/>
-                </a:solidFill>
-                <a:latin typeface="Arial" pitchFamily="34" charset="0"/>
-                <a:ea typeface="Arial" pitchFamily="34" charset="-122"/>
-                <a:cs typeface="Arial" pitchFamily="34" charset="-120"/>
-              </a:rPr>
-              <a:t>The tip makes auxin that suppresses lateral buds, so removing it lets side buds grow</a:t>
-            </a:r>
-            <a:endParaRPr lang="en-US" sz="1500" dirty="0"/>
+              <a:rPr lang="en-US" sz="1300" dirty="0">
+                <a:solidFill>
+                  <a:srgbClr val="FFFFFF"/>
+                </a:solidFill>
+                <a:latin typeface="Arial" pitchFamily="34" charset="0"/>
+                <a:ea typeface="Arial" pitchFamily="34" charset="-122"/>
+                <a:cs typeface="Arial" pitchFamily="34" charset="-120"/>
+              </a:rPr>
+              <a:t>Auxin from the shoot tip inhibits lateral buds; with the tip removed, 3 branches grew instead of 0, so the tip was the cause</a:t>
+            </a:r>
+            <a:endParaRPr lang="en-US" sz="1300" dirty="0"/>
           </a:p>
         </p:txBody>
       </p:sp>
@@ -4361,7 +4560,7 @@
                 <a:ea typeface="Arial" pitchFamily="34" charset="-122"/>
                 <a:cs typeface="Arial" pitchFamily="34" charset="-120"/>
               </a:rPr>
-              <a:t>QUESTION 5 OF 7</a:t>
+              <a:t>QUESTION 5 OF 8</a:t>
             </a:r>
             <a:endParaRPr lang="en-US" sz="1300" dirty="0"/>
           </a:p>
@@ -4453,17 +4652,17 @@
               <a:buNone/>
             </a:pPr>
             <a:r>
-              <a:rPr lang="en-US" sz="2000" b="1" dirty="0">
-                <a:solidFill>
-                  <a:srgbClr val="FFFFFF"/>
-                </a:solidFill>
-                <a:latin typeface="Arial" pitchFamily="34" charset="0"/>
-                <a:ea typeface="Arial" pitchFamily="34" charset="-122"/>
-                <a:cs typeface="Arial" pitchFamily="34" charset="-120"/>
-              </a:rPr>
-              <a:t>A student writes: 'Hormones are food for the plant, so a plant with more hormones has more energy to grow.' What is wrong with this idea?</a:t>
-            </a:r>
-            <a:endParaRPr lang="en-US" sz="2000" dirty="0"/>
+              <a:rPr lang="en-US" sz="1800" b="1" dirty="0">
+                <a:solidFill>
+                  <a:srgbClr val="FFFFFF"/>
+                </a:solidFill>
+                <a:latin typeface="Arial" pitchFamily="34" charset="0"/>
+                <a:ea typeface="Arial" pitchFamily="34" charset="-122"/>
+                <a:cs typeface="Arial" pitchFamily="34" charset="-120"/>
+              </a:rPr>
+              <a:t>A farmer had 8 healthy-looking bean seeds with hard seed coats that did not germinate. After scarification, 7 of the 8 germinated by Day 7. Which hormone idea best explains why the seeds were dormant before scarification and how they woke up?</a:t>
+            </a:r>
+            <a:endParaRPr lang="en-US" sz="1800" dirty="0"/>
           </a:p>
         </p:txBody>
       </p:sp>
@@ -4553,17 +4752,17 @@
               <a:buNone/>
             </a:pPr>
             <a:r>
-              <a:rPr lang="en-US" sz="1500" dirty="0">
-                <a:solidFill>
-                  <a:srgbClr val="FFFFFF"/>
-                </a:solidFill>
-                <a:latin typeface="Arial" pitchFamily="34" charset="0"/>
-                <a:ea typeface="Arial" pitchFamily="34" charset="-122"/>
-                <a:cs typeface="Arial" pitchFamily="34" charset="-120"/>
-              </a:rPr>
-              <a:t>Hormones only work on seeds and never on shoots or roots</a:t>
-            </a:r>
-            <a:endParaRPr lang="en-US" sz="1500" dirty="0"/>
+              <a:rPr lang="en-US" sz="1700" dirty="0">
+                <a:solidFill>
+                  <a:srgbClr val="FFFFFF"/>
+                </a:solidFill>
+                <a:latin typeface="Arial" pitchFamily="34" charset="0"/>
+                <a:ea typeface="Arial" pitchFamily="34" charset="-122"/>
+                <a:cs typeface="Arial" pitchFamily="34" charset="-120"/>
+              </a:rPr>
+              <a:t>Hormones played no part, because only the hard seed coat matters</a:t>
+            </a:r>
+            <a:endParaRPr lang="en-US" sz="1700" dirty="0"/>
           </a:p>
         </p:txBody>
       </p:sp>
@@ -4653,17 +4852,17 @@
               <a:buNone/>
             </a:pPr>
             <a:r>
-              <a:rPr lang="en-US" sz="1500" dirty="0">
-                <a:solidFill>
-                  <a:srgbClr val="FFFFFF"/>
-                </a:solidFill>
-                <a:latin typeface="Arial" pitchFamily="34" charset="0"/>
-                <a:ea typeface="Arial" pitchFamily="34" charset="-122"/>
-                <a:cs typeface="Arial" pitchFamily="34" charset="-120"/>
-              </a:rPr>
-              <a:t>Nothing is wrong; hormones are the main food of a plant</a:t>
-            </a:r>
-            <a:endParaRPr lang="en-US" sz="1500" dirty="0"/>
+              <a:rPr lang="en-US" sz="1700" dirty="0">
+                <a:solidFill>
+                  <a:srgbClr val="FFFFFF"/>
+                </a:solidFill>
+                <a:latin typeface="Arial" pitchFamily="34" charset="0"/>
+                <a:ea typeface="Arial" pitchFamily="34" charset="-122"/>
+                <a:cs typeface="Arial" pitchFamily="34" charset="-120"/>
+              </a:rPr>
+              <a:t>Abscisic acid maintains dormancy, while gibberellins promote germination</a:t>
+            </a:r>
+            <a:endParaRPr lang="en-US" sz="1700" dirty="0"/>
           </a:p>
         </p:txBody>
       </p:sp>
@@ -4753,17 +4952,17 @@
               <a:buNone/>
             </a:pPr>
             <a:r>
-              <a:rPr lang="en-US" sz="1500" dirty="0">
-                <a:solidFill>
-                  <a:srgbClr val="FFFFFF"/>
-                </a:solidFill>
-                <a:latin typeface="Arial" pitchFamily="34" charset="0"/>
-                <a:ea typeface="Arial" pitchFamily="34" charset="-122"/>
-                <a:cs typeface="Arial" pitchFamily="34" charset="-120"/>
-              </a:rPr>
-              <a:t>Hormones are chemical messengers that control growth processes; they are not food</a:t>
-            </a:r>
-            <a:endParaRPr lang="en-US" sz="1500" dirty="0"/>
+              <a:rPr lang="en-US" sz="1700" dirty="0">
+                <a:solidFill>
+                  <a:srgbClr val="FFFFFF"/>
+                </a:solidFill>
+                <a:latin typeface="Arial" pitchFamily="34" charset="0"/>
+                <a:ea typeface="Arial" pitchFamily="34" charset="-122"/>
+                <a:cs typeface="Arial" pitchFamily="34" charset="-120"/>
+              </a:rPr>
+              <a:t>Ethylene kept the seeds dormant and auxin made them germinate</a:t>
+            </a:r>
+            <a:endParaRPr lang="en-US" sz="1700" dirty="0"/>
           </a:p>
         </p:txBody>
       </p:sp>
@@ -4853,17 +5052,17 @@
               <a:buNone/>
             </a:pPr>
             <a:r>
-              <a:rPr lang="en-US" sz="1500" dirty="0">
-                <a:solidFill>
-                  <a:srgbClr val="FFFFFF"/>
-                </a:solidFill>
-                <a:latin typeface="Arial" pitchFamily="34" charset="0"/>
-                <a:ea typeface="Arial" pitchFamily="34" charset="-122"/>
-                <a:cs typeface="Arial" pitchFamily="34" charset="-120"/>
-              </a:rPr>
-              <a:t>Hormones are found only in animals, not in plants</a:t>
-            </a:r>
-            <a:endParaRPr lang="en-US" sz="1500" dirty="0"/>
+              <a:rPr lang="en-US" sz="1700" dirty="0">
+                <a:solidFill>
+                  <a:srgbClr val="FFFFFF"/>
+                </a:solidFill>
+                <a:latin typeface="Arial" pitchFamily="34" charset="0"/>
+                <a:ea typeface="Arial" pitchFamily="34" charset="-122"/>
+                <a:cs typeface="Arial" pitchFamily="34" charset="-120"/>
+              </a:rPr>
+              <a:t>Cytokinin maintains dormancy, while abscisic acid promotes germination</a:t>
+            </a:r>
+            <a:endParaRPr lang="en-US" sz="1700" dirty="0"/>
           </a:p>
         </p:txBody>
       </p:sp>
@@ -4971,7 +5170,7 @@
                 <a:ea typeface="Arial" pitchFamily="34" charset="-122"/>
                 <a:cs typeface="Arial" pitchFamily="34" charset="-120"/>
               </a:rPr>
-              <a:t>QUESTION 6 OF 7</a:t>
+              <a:t>QUESTION 6 OF 8</a:t>
             </a:r>
             <a:endParaRPr lang="en-US" sz="1300" dirty="0"/>
           </a:p>
@@ -5032,7 +5231,7 @@
                 <a:ea typeface="Arial" pitchFamily="34" charset="-122"/>
                 <a:cs typeface="Arial" pitchFamily="34" charset="-120"/>
               </a:rPr>
-              <a:t>Use after: Explain phase</a:t>
+              <a:t>Use after: DQB phase</a:t>
             </a:r>
             <a:endParaRPr lang="en-US" sz="1100" dirty="0"/>
           </a:p>
@@ -5071,7 +5270,7 @@
                 <a:ea typeface="Arial" pitchFamily="34" charset="-122"/>
                 <a:cs typeface="Arial" pitchFamily="34" charset="-120"/>
               </a:rPr>
-              <a:t>Farmers in Kericho root tea cuttings using natural sources such as bulb onion or Aloe extract. Which hormone group do these sources help to supply so that roots form on the cuttings?</a:t>
+              <a:t>After the lesson, a learner says: 'Each plant hormone does only one job.' Which fact from this lesson shows that this idea is wrong?</a:t>
             </a:r>
             <a:endParaRPr lang="en-US" sz="2000" dirty="0"/>
           </a:p>
@@ -5171,7 +5370,7 @@
                 <a:ea typeface="Arial" pitchFamily="34" charset="-122"/>
                 <a:cs typeface="Arial" pitchFamily="34" charset="-120"/>
               </a:rPr>
-              <a:t>Abscisic acid, which keeps the cutting dormant</a:t>
+              <a:t>Ethylene promotes fruit ripening</a:t>
             </a:r>
             <a:endParaRPr lang="en-US" sz="1700" dirty="0"/>
           </a:p>
@@ -5271,7 +5470,7 @@
                 <a:ea typeface="Arial" pitchFamily="34" charset="-122"/>
                 <a:cs typeface="Arial" pitchFamily="34" charset="-120"/>
               </a:rPr>
-              <a:t>Ethylene, which ripens the cutting</a:t>
+              <a:t>Gibberellins promote both seed germination and stem elongation</a:t>
             </a:r>
             <a:endParaRPr lang="en-US" sz="1700" dirty="0"/>
           </a:p>
@@ -5371,7 +5570,7 @@
                 <a:ea typeface="Arial" pitchFamily="34" charset="-122"/>
                 <a:cs typeface="Arial" pitchFamily="34" charset="-120"/>
               </a:rPr>
-              <a:t>Gibberellins, which close the stomata</a:t>
+              <a:t>Cytokinins promote cell division</a:t>
             </a:r>
             <a:endParaRPr lang="en-US" sz="1700" dirty="0"/>
           </a:p>
@@ -5471,7 +5670,7 @@
                 <a:ea typeface="Arial" pitchFamily="34" charset="-122"/>
                 <a:cs typeface="Arial" pitchFamily="34" charset="-120"/>
               </a:rPr>
-              <a:t>Auxins, which promote the rooting of cuttings</a:t>
+              <a:t>Abscisic acid maintains dormancy</a:t>
             </a:r>
             <a:endParaRPr lang="en-US" sz="1700" dirty="0"/>
           </a:p>
@@ -5581,7 +5780,7 @@
                 <a:ea typeface="Arial" pitchFamily="34" charset="-122"/>
                 <a:cs typeface="Arial" pitchFamily="34" charset="-120"/>
               </a:rPr>
-              <a:t>QUESTION 7 OF 7</a:t>
+              <a:t>QUESTION 7 OF 8</a:t>
             </a:r>
             <a:endParaRPr lang="en-US" sz="1300" dirty="0"/>
           </a:p>
@@ -5681,7 +5880,7 @@
                 <a:ea typeface="Arial" pitchFamily="34" charset="-122"/>
                 <a:cs typeface="Arial" pitchFamily="34" charset="-120"/>
               </a:rPr>
-              <a:t>Two maize seeds are planted on the same day with the same rain. One germinates in three days and the other takes longer. What is the best explanation that includes hormones?</a:t>
+              <a:t>Learners are revising their Day 1 model of maize and beans. Which labelled arrow should they add to show apical dominance?</a:t>
             </a:r>
             <a:endParaRPr lang="en-US" sz="2000" dirty="0"/>
           </a:p>
@@ -5773,17 +5972,17 @@
               <a:buNone/>
             </a:pPr>
             <a:r>
-              <a:rPr lang="en-US" sz="1300" dirty="0">
-                <a:solidFill>
-                  <a:srgbClr val="FFFFFF"/>
-                </a:solidFill>
-                <a:latin typeface="Arial" pitchFamily="34" charset="0"/>
-                <a:ea typeface="Arial" pitchFamily="34" charset="-122"/>
-                <a:cs typeface="Arial" pitchFamily="34" charset="-120"/>
-              </a:rPr>
-              <a:t>Hormones respond to conditions such as water, oxygen and temperature, so seeds can differ in when they germinate</a:t>
-            </a:r>
-            <a:endParaRPr lang="en-US" sz="1300" dirty="0"/>
+              <a:rPr lang="en-US" sz="1700" dirty="0">
+                <a:solidFill>
+                  <a:srgbClr val="FFFFFF"/>
+                </a:solidFill>
+                <a:latin typeface="Arial" pitchFamily="34" charset="0"/>
+                <a:ea typeface="Arial" pitchFamily="34" charset="-122"/>
+                <a:cs typeface="Arial" pitchFamily="34" charset="-120"/>
+              </a:rPr>
+              <a:t>Abscisic acid from the lateral buds, promoting stem elongation</a:t>
+            </a:r>
+            <a:endParaRPr lang="en-US" sz="1700" dirty="0"/>
           </a:p>
         </p:txBody>
       </p:sp>
@@ -5873,17 +6072,17 @@
               <a:buNone/>
             </a:pPr>
             <a:r>
-              <a:rPr lang="en-US" sz="1300" dirty="0">
-                <a:solidFill>
-                  <a:srgbClr val="FFFFFF"/>
-                </a:solidFill>
-                <a:latin typeface="Arial" pitchFamily="34" charset="0"/>
-                <a:ea typeface="Arial" pitchFamily="34" charset="-122"/>
-                <a:cs typeface="Arial" pitchFamily="34" charset="-120"/>
-              </a:rPr>
-              <a:t>Only seeds without hormones can germinate late</a:t>
-            </a:r>
-            <a:endParaRPr lang="en-US" sz="1300" dirty="0"/>
+              <a:rPr lang="en-US" sz="1700" dirty="0">
+                <a:solidFill>
+                  <a:srgbClr val="FFFFFF"/>
+                </a:solidFill>
+                <a:latin typeface="Arial" pitchFamily="34" charset="0"/>
+                <a:ea typeface="Arial" pitchFamily="34" charset="-122"/>
+                <a:cs typeface="Arial" pitchFamily="34" charset="-120"/>
+              </a:rPr>
+              <a:t>Gibberellins from the shoot tip, maintaining dormancy</a:t>
+            </a:r>
+            <a:endParaRPr lang="en-US" sz="1700" dirty="0"/>
           </a:p>
         </p:txBody>
       </p:sp>
@@ -5973,17 +6172,17 @@
               <a:buNone/>
             </a:pPr>
             <a:r>
-              <a:rPr lang="en-US" sz="1300" dirty="0">
-                <a:solidFill>
-                  <a:srgbClr val="FFFFFF"/>
-                </a:solidFill>
-                <a:latin typeface="Arial" pitchFamily="34" charset="0"/>
-                <a:ea typeface="Arial" pitchFamily="34" charset="-122"/>
-                <a:cs typeface="Arial" pitchFamily="34" charset="-120"/>
-              </a:rPr>
-              <a:t>Rain alone decides when every seed germinates, so hormones play no part</a:t>
-            </a:r>
-            <a:endParaRPr lang="en-US" sz="1300" dirty="0"/>
+              <a:rPr lang="en-US" sz="1700" dirty="0">
+                <a:solidFill>
+                  <a:srgbClr val="FFFFFF"/>
+                </a:solidFill>
+                <a:latin typeface="Arial" pitchFamily="34" charset="0"/>
+                <a:ea typeface="Arial" pitchFamily="34" charset="-122"/>
+                <a:cs typeface="Arial" pitchFamily="34" charset="-120"/>
+              </a:rPr>
+              <a:t>Cytokinin from the shoot tip, inhibiting lateral buds</a:t>
+            </a:r>
+            <a:endParaRPr lang="en-US" sz="1700" dirty="0"/>
           </a:p>
         </p:txBody>
       </p:sp>
@@ -6073,17 +6272,17 @@
               <a:buNone/>
             </a:pPr>
             <a:r>
-              <a:rPr lang="en-US" sz="1300" dirty="0">
-                <a:solidFill>
-                  <a:srgbClr val="FFFFFF"/>
-                </a:solidFill>
-                <a:latin typeface="Arial" pitchFamily="34" charset="0"/>
-                <a:ea typeface="Arial" pitchFamily="34" charset="-122"/>
-                <a:cs typeface="Arial" pitchFamily="34" charset="-120"/>
-              </a:rPr>
-              <a:t>Hormones replace water, oxygen and temperature, so these factors do not matter</a:t>
-            </a:r>
-            <a:endParaRPr lang="en-US" sz="1300" dirty="0"/>
+              <a:rPr lang="en-US" sz="1700" dirty="0">
+                <a:solidFill>
+                  <a:srgbClr val="FFFFFF"/>
+                </a:solidFill>
+                <a:latin typeface="Arial" pitchFamily="34" charset="0"/>
+                <a:ea typeface="Arial" pitchFamily="34" charset="-122"/>
+                <a:cs typeface="Arial" pitchFamily="34" charset="-120"/>
+              </a:rPr>
+              <a:t>Auxin from the shoot tip, inhibiting lateral buds</a:t>
+            </a:r>
+            <a:endParaRPr lang="en-US" sz="1700" dirty="0"/>
           </a:p>
         </p:txBody>
       </p:sp>
@@ -6140,7 +6339,7 @@
     <p:bg>
       <p:bgPr>
         <a:solidFill>
-          <a:srgbClr val="1F3864"/>
+          <a:srgbClr val="6A4C93"/>
         </a:solidFill>
       </p:bgPr>
     </p:bg>
@@ -6166,73 +6365,573 @@
         </p:nvSpPr>
         <p:spPr>
           <a:xfrm>
-            <a:off x="731520" y="2194560"/>
-            <a:ext cx="10698480" cy="822960"/>
-          </a:xfrm>
-          <a:prstGeom prst="rect">
-            <a:avLst/>
-          </a:prstGeom>
-          <a:noFill/>
-          <a:ln/>
-        </p:spPr>
-        <p:txBody>
-          <a:bodyPr wrap="square" lIns="0" tIns="0" rIns="0" bIns="0" rtlCol="0" anchor="ctr"/>
-          <a:lstStyle/>
-          <a:p>
-            <a:pPr indent="0" marL="0">
-              <a:buNone/>
-            </a:pPr>
-            <a:r>
-              <a:rPr lang="en-US" sz="3400" b="1" dirty="0">
-                <a:solidFill>
-                  <a:srgbClr val="FFFFFF"/>
-                </a:solidFill>
-                <a:latin typeface="Arial" pitchFamily="34" charset="0"/>
-                <a:ea typeface="Arial" pitchFamily="34" charset="-122"/>
-                <a:cs typeface="Arial" pitchFamily="34" charset="-120"/>
-              </a:rPr>
-              <a:t>All done</a:t>
-            </a:r>
-            <a:endParaRPr lang="en-US" sz="3400" dirty="0"/>
-          </a:p>
-        </p:txBody>
-      </p:sp>
-      <p:sp>
-        <p:nvSpPr>
-          <p:cNvPr id="3" name="Text 1"/>
-          <p:cNvSpPr/>
-          <p:nvPr/>
-        </p:nvSpPr>
-        <p:spPr>
-          <a:xfrm>
-            <a:off x="731520" y="3108960"/>
-            <a:ext cx="10698480" cy="731520"/>
-          </a:xfrm>
-          <a:prstGeom prst="rect">
-            <a:avLst/>
-          </a:prstGeom>
-          <a:noFill/>
-          <a:ln/>
-        </p:spPr>
-        <p:txBody>
-          <a:bodyPr wrap="square" lIns="0" tIns="0" rIns="0" bIns="0" rtlCol="0" anchor="ctr"/>
-          <a:lstStyle/>
-          <a:p>
-            <a:pPr indent="0" marL="0">
-              <a:buNone/>
-            </a:pPr>
-            <a:r>
-              <a:rPr lang="en-US" sz="1800" dirty="0">
-                <a:solidFill>
-                  <a:srgbClr val="D9EEF1"/>
-                </a:solidFill>
-                <a:latin typeface="Arial" pitchFamily="34" charset="0"/>
-                <a:ea typeface="Arial" pitchFamily="34" charset="-122"/>
-                <a:cs typeface="Arial" pitchFamily="34" charset="-120"/>
-              </a:rPr>
-              <a:t>Ask your teacher how to submit your answers today (for example, on a paper answer slip).</a:t>
+            <a:off x="548640" y="365760"/>
+            <a:ext cx="6400800" cy="365760"/>
+          </a:xfrm>
+          <a:prstGeom prst="rect">
+            <a:avLst/>
+          </a:prstGeom>
+          <a:noFill/>
+          <a:ln/>
+        </p:spPr>
+        <p:txBody>
+          <a:bodyPr wrap="square" lIns="0" tIns="0" rIns="0" bIns="0" rtlCol="0" anchor="ctr"/>
+          <a:lstStyle/>
+          <a:p>
+            <a:pPr indent="0" marL="0">
+              <a:buNone/>
+            </a:pPr>
+            <a:r>
+              <a:rPr lang="en-US" sz="1300" b="1" spc="200" kern="0" dirty="0">
+                <a:solidFill>
+                  <a:srgbClr val="E0D6F0"/>
+                </a:solidFill>
+                <a:latin typeface="Arial" pitchFamily="34" charset="0"/>
+                <a:ea typeface="Arial" pitchFamily="34" charset="-122"/>
+                <a:cs typeface="Arial" pitchFamily="34" charset="-120"/>
+              </a:rPr>
+              <a:t>QUESTION 8 OF 8</a:t>
+            </a:r>
+            <a:endParaRPr lang="en-US" sz="1300" dirty="0"/>
+          </a:p>
+        </p:txBody>
+      </p:sp>
+      <p:sp>
+        <p:nvSpPr>
+          <p:cNvPr id="3" name="Shape 1"/>
+          <p:cNvSpPr/>
+          <p:nvPr/>
+        </p:nvSpPr>
+        <p:spPr>
+          <a:xfrm>
+            <a:off x="8138160" y="320040"/>
+            <a:ext cx="3474720" cy="365760"/>
+          </a:xfrm>
+          <a:prstGeom prst="roundRect">
+            <a:avLst>
+              <a:gd name="adj" fmla="val 15000"/>
+            </a:avLst>
+          </a:prstGeom>
+          <a:solidFill>
+            <a:srgbClr val="5A3F80"/>
+          </a:solidFill>
+          <a:ln/>
+        </p:spPr>
+      </p:sp>
+      <p:sp>
+        <p:nvSpPr>
+          <p:cNvPr id="4" name="Text 2"/>
+          <p:cNvSpPr/>
+          <p:nvPr/>
+        </p:nvSpPr>
+        <p:spPr>
+          <a:xfrm>
+            <a:off x="8138160" y="320040"/>
+            <a:ext cx="3474720" cy="365760"/>
+          </a:xfrm>
+          <a:prstGeom prst="rect">
+            <a:avLst/>
+          </a:prstGeom>
+          <a:noFill/>
+          <a:ln/>
+        </p:spPr>
+        <p:txBody>
+          <a:bodyPr wrap="square" lIns="0" tIns="0" rIns="0" bIns="0" rtlCol="0" anchor="ctr"/>
+          <a:lstStyle/>
+          <a:p>
+            <a:pPr algn="ctr" indent="0" marL="0">
+              <a:buNone/>
+            </a:pPr>
+            <a:r>
+              <a:rPr lang="en-US" sz="1100" i="1" dirty="0">
+                <a:solidFill>
+                  <a:srgbClr val="E0D6F0"/>
+                </a:solidFill>
+                <a:latin typeface="Arial" pitchFamily="34" charset="0"/>
+                <a:ea typeface="Arial" pitchFamily="34" charset="-122"/>
+                <a:cs typeface="Arial" pitchFamily="34" charset="-120"/>
+              </a:rPr>
+              <a:t>Use after: End of lesson</a:t>
+            </a:r>
+            <a:endParaRPr lang="en-US" sz="1100" dirty="0"/>
+          </a:p>
+        </p:txBody>
+      </p:sp>
+      <p:sp>
+        <p:nvSpPr>
+          <p:cNvPr id="5" name="Text 3"/>
+          <p:cNvSpPr/>
+          <p:nvPr/>
+        </p:nvSpPr>
+        <p:spPr>
+          <a:xfrm>
+            <a:off x="548640" y="868680"/>
+            <a:ext cx="11064240" cy="1325880"/>
+          </a:xfrm>
+          <a:prstGeom prst="rect">
+            <a:avLst/>
+          </a:prstGeom>
+          <a:noFill/>
+          <a:ln/>
+        </p:spPr>
+        <p:txBody>
+          <a:bodyPr wrap="square" lIns="0" tIns="0" rIns="0" bIns="0" rtlCol="0" anchor="ctr"/>
+          <a:lstStyle/>
+          <a:p>
+            <a:pPr indent="0" marL="0">
+              <a:buNone/>
+            </a:pPr>
+            <a:r>
+              <a:rPr lang="en-US" sz="2000" b="1" dirty="0">
+                <a:solidFill>
+                  <a:srgbClr val="FFFFFF"/>
+                </a:solidFill>
+                <a:latin typeface="Arial" pitchFamily="34" charset="0"/>
+                <a:ea typeface="Arial" pitchFamily="34" charset="-122"/>
+                <a:cs typeface="Arial" pitchFamily="34" charset="-120"/>
+              </a:rPr>
+              <a:t>A farmer in Kitale cuts off the shoot tip of a bean plant and wants more side branches. Which hormone effect explains why this works?</a:t>
+            </a:r>
+            <a:endParaRPr lang="en-US" sz="2000" dirty="0"/>
+          </a:p>
+        </p:txBody>
+      </p:sp>
+      <p:sp>
+        <p:nvSpPr>
+          <p:cNvPr id="6" name="Shape 4"/>
+          <p:cNvSpPr/>
+          <p:nvPr/>
+        </p:nvSpPr>
+        <p:spPr>
+          <a:xfrm>
+            <a:off x="731520" y="2331720"/>
+            <a:ext cx="10698480" cy="777240"/>
+          </a:xfrm>
+          <a:prstGeom prst="roundRect">
+            <a:avLst>
+              <a:gd name="adj" fmla="val 9412"/>
+            </a:avLst>
+          </a:prstGeom>
+          <a:solidFill>
+            <a:srgbClr val="7C5CAA"/>
+          </a:solidFill>
+          <a:ln/>
+        </p:spPr>
+      </p:sp>
+      <p:sp>
+        <p:nvSpPr>
+          <p:cNvPr id="7" name="Text 5"/>
+          <p:cNvSpPr/>
+          <p:nvPr/>
+        </p:nvSpPr>
+        <p:spPr>
+          <a:xfrm>
+            <a:off x="914400" y="2331720"/>
+            <a:ext cx="548640" cy="777240"/>
+          </a:xfrm>
+          <a:prstGeom prst="rect">
+            <a:avLst/>
+          </a:prstGeom>
+          <a:noFill/>
+          <a:ln/>
+        </p:spPr>
+        <p:txBody>
+          <a:bodyPr wrap="square" lIns="0" tIns="0" rIns="0" bIns="0" rtlCol="0" anchor="ctr"/>
+          <a:lstStyle/>
+          <a:p>
+            <a:pPr indent="0" marL="0">
+              <a:buNone/>
+            </a:pPr>
+            <a:r>
+              <a:rPr lang="en-US" sz="1800" b="1" dirty="0">
+                <a:solidFill>
+                  <a:srgbClr val="FFFFFF"/>
+                </a:solidFill>
+                <a:latin typeface="Arial" pitchFamily="34" charset="0"/>
+                <a:ea typeface="Arial" pitchFamily="34" charset="-122"/>
+                <a:cs typeface="Arial" pitchFamily="34" charset="-120"/>
+              </a:rPr>
+              <a:t>A</a:t>
             </a:r>
             <a:endParaRPr lang="en-US" sz="1800" dirty="0"/>
+          </a:p>
+        </p:txBody>
+      </p:sp>
+      <p:sp>
+        <p:nvSpPr>
+          <p:cNvPr id="8" name="Text 6"/>
+          <p:cNvSpPr/>
+          <p:nvPr/>
+        </p:nvSpPr>
+        <p:spPr>
+          <a:xfrm>
+            <a:off x="1554480" y="2331720"/>
+            <a:ext cx="9692640" cy="777240"/>
+          </a:xfrm>
+          <a:prstGeom prst="rect">
+            <a:avLst/>
+          </a:prstGeom>
+          <a:noFill/>
+          <a:ln/>
+        </p:spPr>
+        <p:txBody>
+          <a:bodyPr wrap="square" lIns="0" tIns="0" rIns="0" bIns="0" rtlCol="0" anchor="ctr"/>
+          <a:lstStyle/>
+          <a:p>
+            <a:pPr indent="0" marL="0">
+              <a:buNone/>
+            </a:pPr>
+            <a:r>
+              <a:rPr lang="en-US" sz="1500" dirty="0">
+                <a:solidFill>
+                  <a:srgbClr val="FFFFFF"/>
+                </a:solidFill>
+                <a:latin typeface="Arial" pitchFamily="34" charset="0"/>
+                <a:ea typeface="Arial" pitchFamily="34" charset="-122"/>
+                <a:cs typeface="Arial" pitchFamily="34" charset="-120"/>
+              </a:rPr>
+              <a:t>Cutting the tip makes ethylene ripen the side buds into branches</a:t>
+            </a:r>
+            <a:endParaRPr lang="en-US" sz="1500" dirty="0"/>
+          </a:p>
+        </p:txBody>
+      </p:sp>
+      <p:sp>
+        <p:nvSpPr>
+          <p:cNvPr id="9" name="Shape 7"/>
+          <p:cNvSpPr/>
+          <p:nvPr/>
+        </p:nvSpPr>
+        <p:spPr>
+          <a:xfrm>
+            <a:off x="731520" y="3246120"/>
+            <a:ext cx="10698480" cy="777240"/>
+          </a:xfrm>
+          <a:prstGeom prst="roundRect">
+            <a:avLst>
+              <a:gd name="adj" fmla="val 9412"/>
+            </a:avLst>
+          </a:prstGeom>
+          <a:solidFill>
+            <a:srgbClr val="7C5CAA"/>
+          </a:solidFill>
+          <a:ln/>
+        </p:spPr>
+      </p:sp>
+      <p:sp>
+        <p:nvSpPr>
+          <p:cNvPr id="10" name="Text 8"/>
+          <p:cNvSpPr/>
+          <p:nvPr/>
+        </p:nvSpPr>
+        <p:spPr>
+          <a:xfrm>
+            <a:off x="914400" y="3246120"/>
+            <a:ext cx="548640" cy="777240"/>
+          </a:xfrm>
+          <a:prstGeom prst="rect">
+            <a:avLst/>
+          </a:prstGeom>
+          <a:noFill/>
+          <a:ln/>
+        </p:spPr>
+        <p:txBody>
+          <a:bodyPr wrap="square" lIns="0" tIns="0" rIns="0" bIns="0" rtlCol="0" anchor="ctr"/>
+          <a:lstStyle/>
+          <a:p>
+            <a:pPr indent="0" marL="0">
+              <a:buNone/>
+            </a:pPr>
+            <a:r>
+              <a:rPr lang="en-US" sz="1800" b="1" dirty="0">
+                <a:solidFill>
+                  <a:srgbClr val="FFFFFF"/>
+                </a:solidFill>
+                <a:latin typeface="Arial" pitchFamily="34" charset="0"/>
+                <a:ea typeface="Arial" pitchFamily="34" charset="-122"/>
+                <a:cs typeface="Arial" pitchFamily="34" charset="-120"/>
+              </a:rPr>
+              <a:t>B</a:t>
+            </a:r>
+            <a:endParaRPr lang="en-US" sz="1800" dirty="0"/>
+          </a:p>
+        </p:txBody>
+      </p:sp>
+      <p:sp>
+        <p:nvSpPr>
+          <p:cNvPr id="11" name="Text 9"/>
+          <p:cNvSpPr/>
+          <p:nvPr/>
+        </p:nvSpPr>
+        <p:spPr>
+          <a:xfrm>
+            <a:off x="1554480" y="3246120"/>
+            <a:ext cx="9692640" cy="777240"/>
+          </a:xfrm>
+          <a:prstGeom prst="rect">
+            <a:avLst/>
+          </a:prstGeom>
+          <a:noFill/>
+          <a:ln/>
+        </p:spPr>
+        <p:txBody>
+          <a:bodyPr wrap="square" lIns="0" tIns="0" rIns="0" bIns="0" rtlCol="0" anchor="ctr"/>
+          <a:lstStyle/>
+          <a:p>
+            <a:pPr indent="0" marL="0">
+              <a:buNone/>
+            </a:pPr>
+            <a:r>
+              <a:rPr lang="en-US" sz="1500" dirty="0">
+                <a:solidFill>
+                  <a:srgbClr val="FFFFFF"/>
+                </a:solidFill>
+                <a:latin typeface="Arial" pitchFamily="34" charset="0"/>
+                <a:ea typeface="Arial" pitchFamily="34" charset="-122"/>
+                <a:cs typeface="Arial" pitchFamily="34" charset="-120"/>
+              </a:rPr>
+              <a:t>Cutting the tip removes cytokinin, which allows the side buds to grow</a:t>
+            </a:r>
+            <a:endParaRPr lang="en-US" sz="1500" dirty="0"/>
+          </a:p>
+        </p:txBody>
+      </p:sp>
+      <p:sp>
+        <p:nvSpPr>
+          <p:cNvPr id="12" name="Shape 10"/>
+          <p:cNvSpPr/>
+          <p:nvPr/>
+        </p:nvSpPr>
+        <p:spPr>
+          <a:xfrm>
+            <a:off x="731520" y="4160520"/>
+            <a:ext cx="10698480" cy="777240"/>
+          </a:xfrm>
+          <a:prstGeom prst="roundRect">
+            <a:avLst>
+              <a:gd name="adj" fmla="val 9412"/>
+            </a:avLst>
+          </a:prstGeom>
+          <a:solidFill>
+            <a:srgbClr val="7C5CAA"/>
+          </a:solidFill>
+          <a:ln/>
+        </p:spPr>
+      </p:sp>
+      <p:sp>
+        <p:nvSpPr>
+          <p:cNvPr id="13" name="Text 11"/>
+          <p:cNvSpPr/>
+          <p:nvPr/>
+        </p:nvSpPr>
+        <p:spPr>
+          <a:xfrm>
+            <a:off x="914400" y="4160520"/>
+            <a:ext cx="548640" cy="777240"/>
+          </a:xfrm>
+          <a:prstGeom prst="rect">
+            <a:avLst/>
+          </a:prstGeom>
+          <a:noFill/>
+          <a:ln/>
+        </p:spPr>
+        <p:txBody>
+          <a:bodyPr wrap="square" lIns="0" tIns="0" rIns="0" bIns="0" rtlCol="0" anchor="ctr"/>
+          <a:lstStyle/>
+          <a:p>
+            <a:pPr indent="0" marL="0">
+              <a:buNone/>
+            </a:pPr>
+            <a:r>
+              <a:rPr lang="en-US" sz="1800" b="1" dirty="0">
+                <a:solidFill>
+                  <a:srgbClr val="FFFFFF"/>
+                </a:solidFill>
+                <a:latin typeface="Arial" pitchFamily="34" charset="0"/>
+                <a:ea typeface="Arial" pitchFamily="34" charset="-122"/>
+                <a:cs typeface="Arial" pitchFamily="34" charset="-120"/>
+              </a:rPr>
+              <a:t>C</a:t>
+            </a:r>
+            <a:endParaRPr lang="en-US" sz="1800" dirty="0"/>
+          </a:p>
+        </p:txBody>
+      </p:sp>
+      <p:sp>
+        <p:nvSpPr>
+          <p:cNvPr id="14" name="Text 12"/>
+          <p:cNvSpPr/>
+          <p:nvPr/>
+        </p:nvSpPr>
+        <p:spPr>
+          <a:xfrm>
+            <a:off x="1554480" y="4160520"/>
+            <a:ext cx="9692640" cy="777240"/>
+          </a:xfrm>
+          <a:prstGeom prst="rect">
+            <a:avLst/>
+          </a:prstGeom>
+          <a:noFill/>
+          <a:ln/>
+        </p:spPr>
+        <p:txBody>
+          <a:bodyPr wrap="square" lIns="0" tIns="0" rIns="0" bIns="0" rtlCol="0" anchor="ctr"/>
+          <a:lstStyle/>
+          <a:p>
+            <a:pPr indent="0" marL="0">
+              <a:buNone/>
+            </a:pPr>
+            <a:r>
+              <a:rPr lang="en-US" sz="1500" dirty="0">
+                <a:solidFill>
+                  <a:srgbClr val="FFFFFF"/>
+                </a:solidFill>
+                <a:latin typeface="Arial" pitchFamily="34" charset="0"/>
+                <a:ea typeface="Arial" pitchFamily="34" charset="-122"/>
+                <a:cs typeface="Arial" pitchFamily="34" charset="-120"/>
+              </a:rPr>
+              <a:t>Without the tip, less auxin reaches the side buds, so they are no longer inhibited and can grow</a:t>
+            </a:r>
+            <a:endParaRPr lang="en-US" sz="1500" dirty="0"/>
+          </a:p>
+        </p:txBody>
+      </p:sp>
+      <p:sp>
+        <p:nvSpPr>
+          <p:cNvPr id="15" name="Shape 13"/>
+          <p:cNvSpPr/>
+          <p:nvPr/>
+        </p:nvSpPr>
+        <p:spPr>
+          <a:xfrm>
+            <a:off x="731520" y="5074920"/>
+            <a:ext cx="10698480" cy="777240"/>
+          </a:xfrm>
+          <a:prstGeom prst="roundRect">
+            <a:avLst>
+              <a:gd name="adj" fmla="val 9412"/>
+            </a:avLst>
+          </a:prstGeom>
+          <a:solidFill>
+            <a:srgbClr val="7C5CAA"/>
+          </a:solidFill>
+          <a:ln/>
+        </p:spPr>
+      </p:sp>
+      <p:sp>
+        <p:nvSpPr>
+          <p:cNvPr id="16" name="Text 14"/>
+          <p:cNvSpPr/>
+          <p:nvPr/>
+        </p:nvSpPr>
+        <p:spPr>
+          <a:xfrm>
+            <a:off x="914400" y="5074920"/>
+            <a:ext cx="548640" cy="777240"/>
+          </a:xfrm>
+          <a:prstGeom prst="rect">
+            <a:avLst/>
+          </a:prstGeom>
+          <a:noFill/>
+          <a:ln/>
+        </p:spPr>
+        <p:txBody>
+          <a:bodyPr wrap="square" lIns="0" tIns="0" rIns="0" bIns="0" rtlCol="0" anchor="ctr"/>
+          <a:lstStyle/>
+          <a:p>
+            <a:pPr indent="0" marL="0">
+              <a:buNone/>
+            </a:pPr>
+            <a:r>
+              <a:rPr lang="en-US" sz="1800" b="1" dirty="0">
+                <a:solidFill>
+                  <a:srgbClr val="FFFFFF"/>
+                </a:solidFill>
+                <a:latin typeface="Arial" pitchFamily="34" charset="0"/>
+                <a:ea typeface="Arial" pitchFamily="34" charset="-122"/>
+                <a:cs typeface="Arial" pitchFamily="34" charset="-120"/>
+              </a:rPr>
+              <a:t>D</a:t>
+            </a:r>
+            <a:endParaRPr lang="en-US" sz="1800" dirty="0"/>
+          </a:p>
+        </p:txBody>
+      </p:sp>
+      <p:sp>
+        <p:nvSpPr>
+          <p:cNvPr id="17" name="Text 15"/>
+          <p:cNvSpPr/>
+          <p:nvPr/>
+        </p:nvSpPr>
+        <p:spPr>
+          <a:xfrm>
+            <a:off x="1554480" y="5074920"/>
+            <a:ext cx="9692640" cy="777240"/>
+          </a:xfrm>
+          <a:prstGeom prst="rect">
+            <a:avLst/>
+          </a:prstGeom>
+          <a:noFill/>
+          <a:ln/>
+        </p:spPr>
+        <p:txBody>
+          <a:bodyPr wrap="square" lIns="0" tIns="0" rIns="0" bIns="0" rtlCol="0" anchor="ctr"/>
+          <a:lstStyle/>
+          <a:p>
+            <a:pPr indent="0" marL="0">
+              <a:buNone/>
+            </a:pPr>
+            <a:r>
+              <a:rPr lang="en-US" sz="1500" dirty="0">
+                <a:solidFill>
+                  <a:srgbClr val="FFFFFF"/>
+                </a:solidFill>
+                <a:latin typeface="Arial" pitchFamily="34" charset="0"/>
+                <a:ea typeface="Arial" pitchFamily="34" charset="-122"/>
+                <a:cs typeface="Arial" pitchFamily="34" charset="-120"/>
+              </a:rPr>
+              <a:t>Cutting the tip makes the plant produce more abscisic acid, which grows side buds</a:t>
+            </a:r>
+            <a:endParaRPr lang="en-US" sz="1500" dirty="0"/>
+          </a:p>
+        </p:txBody>
+      </p:sp>
+      <p:sp>
+        <p:nvSpPr>
+          <p:cNvPr id="18" name="Text 16"/>
+          <p:cNvSpPr/>
+          <p:nvPr/>
+        </p:nvSpPr>
+        <p:spPr>
+          <a:xfrm>
+            <a:off x="11521440" y="6446520"/>
+            <a:ext cx="457200" cy="274320"/>
+          </a:xfrm>
+          <a:prstGeom prst="rect">
+            <a:avLst/>
+          </a:prstGeom>
+          <a:noFill/>
+          <a:ln/>
+        </p:spPr>
+        <p:txBody>
+          <a:bodyPr wrap="square" lIns="0" tIns="0" rIns="0" bIns="0" rtlCol="0" anchor="ctr"/>
+          <a:lstStyle/>
+          <a:p>
+            <a:pPr algn="r" indent="0" marL="0">
+              <a:buNone/>
+            </a:pPr>
+            <a:r>
+              <a:rPr lang="en-US" sz="1000" dirty="0">
+                <a:solidFill>
+                  <a:srgbClr val="C9B8E0"/>
+                </a:solidFill>
+                <a:latin typeface="Arial" pitchFamily="34" charset="0"/>
+                <a:ea typeface="Arial" pitchFamily="34" charset="-122"/>
+                <a:cs typeface="Arial" pitchFamily="34" charset="-120"/>
+              </a:rPr>
+              <a:t>9</a:t>
+            </a:r>
+            <a:endParaRPr lang="en-US" sz="1000" dirty="0"/>
           </a:p>
         </p:txBody>
       </p:sp>
